--- a/figures/fig_controller_interaction.pptx
+++ b/figures/fig_controller_interaction.pptx
@@ -1178,7 +1178,7 @@
                 <a:ea typeface="Arial"/>
                 <a:cs typeface="Arial"/>
               </a:rPr>
-              <a:t>Pending Draft Sequences</a:t>
+              <a:t>Pending draft sequences</a:t>
             </a:r>
             <a:endParaRPr sz="1450" dirty="0"/>
           </a:p>
@@ -1392,7 +1392,7 @@
                 <a:ea typeface="Arial"/>
                 <a:cs typeface="Arial"/>
               </a:rPr>
-              <a:t>One active Draft Sequence</a:t>
+              <a:t>One active draft sequence</a:t>
             </a:r>
             <a:endParaRPr sz="1450"/>
           </a:p>
@@ -1580,7 +1580,7 @@
                 <a:ea typeface="Arial"/>
                 <a:cs typeface="Arial"/>
               </a:rPr>
-              <a:t>Draft </a:t>
+              <a:t>draft </a:t>
             </a:r>
             <a:r>
               <a:rPr sz="1050" b="1" i="1">
@@ -2175,7 +2175,7 @@
                 <a:ea typeface="Arial"/>
                 <a:cs typeface="Arial"/>
               </a:rPr>
-              <a:t>Draft </a:t>
+              <a:t>draft </a:t>
             </a:r>
             <a:r>
               <a:rPr sz="1200" i="1" dirty="0">
@@ -2299,7 +2299,7 @@
                 <a:ea typeface="Arial"/>
                 <a:cs typeface="Arial"/>
               </a:rPr>
-              <a:t>Draft </a:t>
+              <a:t>draft </a:t>
             </a:r>
             <a:r>
               <a:rPr sz="1200" i="1" dirty="0">
@@ -3291,7 +3291,7 @@
                 <a:ea typeface="Arial"/>
                 <a:cs typeface="Arial"/>
               </a:rPr>
-              <a:t>Draft image</a:t>
+              <a:t>draft image</a:t>
             </a:r>
             <a:endParaRPr sz="1100" dirty="0"/>
           </a:p>

--- a/figures/fig_controller_interaction.pptx
+++ b/figures/fig_controller_interaction.pptx
@@ -3313,8 +3313,8 @@
         </p:nvSpPr>
         <p:spPr>
           <a:xfrm>
-            <a:off x="7618780" y="2294724"/>
-            <a:ext cx="1298448" cy="182880"/>
+            <a:off x="7431310" y="2294763"/>
+            <a:ext cx="1485900" cy="182880"/>
           </a:xfrm>
           <a:prstGeom prst="rect">
             <a:avLst/>
@@ -3337,7 +3337,7 @@
               </a:defRPr>
             </a:pPr>
             <a:r>
-              <a:rPr sz="1200" b="1" dirty="0" err="1">
+              <a:rPr sz="1200" b="1">
                 <a:solidFill>
                   <a:srgbClr val="2476D2"/>
                 </a:solidFill>
@@ -3345,20 +3345,9 @@
                 <a:ea typeface="Arial"/>
                 <a:cs typeface="Arial"/>
               </a:rPr>
-              <a:t>decideAdmission</a:t>
+              <a:t>Admission decision</a:t>
             </a:r>
-            <a:r>
-              <a:rPr lang="en-US" sz="1200" b="1" dirty="0">
-                <a:solidFill>
-                  <a:srgbClr val="2476D2"/>
-                </a:solidFill>
-                <a:latin typeface="Arial"/>
-                <a:ea typeface="Arial"/>
-                <a:cs typeface="Arial"/>
-              </a:rPr>
-              <a:t>()</a:t>
-            </a:r>
-            <a:endParaRPr sz="1200" b="1" dirty="0"/>
+            <a:endParaRPr sz="1200" b="1"/>
           </a:p>
         </p:txBody>
       </p:sp>
@@ -4292,8 +4281,8 @@
         </p:nvSpPr>
         <p:spPr>
           <a:xfrm>
-            <a:off x="1128851" y="2282279"/>
-            <a:ext cx="893368" cy="228183"/>
+            <a:off x="802958" y="2282285"/>
+            <a:ext cx="1219200" cy="228219"/>
           </a:xfrm>
           <a:prstGeom prst="rect">
             <a:avLst/>
@@ -4305,6 +4294,7 @@
           <a:lstStyle/>
           <a:p>
             <a:pPr algn="r">
+              <a:buNone/>
               <a:defRPr sz="1200" b="0">
                 <a:solidFill>
                   <a:srgbClr val="E56E2E"/>
@@ -4315,7 +4305,7 @@
               </a:defRPr>
             </a:pPr>
             <a:r>
-              <a:rPr lang="en-US" altLang="ko-KR" sz="1200" b="1" dirty="0" err="1">
+              <a:rPr sz="1200" b="1">
                 <a:solidFill>
                   <a:srgbClr val="E56E2E"/>
                 </a:solidFill>
@@ -4323,20 +4313,9 @@
                 <a:ea typeface="Arial"/>
                 <a:cs typeface="Arial"/>
               </a:rPr>
-              <a:t>decideDelay</a:t>
+              <a:t>Pacing decision</a:t>
             </a:r>
-            <a:r>
-              <a:rPr lang="en-US" altLang="ko-KR" sz="1200" b="1" dirty="0">
-                <a:solidFill>
-                  <a:srgbClr val="E56E2E"/>
-                </a:solidFill>
-                <a:latin typeface="Arial"/>
-                <a:ea typeface="Arial"/>
-                <a:cs typeface="Arial"/>
-              </a:rPr>
-              <a:t>()</a:t>
-            </a:r>
-            <a:endParaRPr sz="1200" b="1" dirty="0"/>
+            <a:endParaRPr sz="1200" b="1"/>
           </a:p>
         </p:txBody>
       </p:sp>
@@ -4746,6 +4725,177 @@
           </a:prstGeom>
         </p:spPr>
       </p:pic>
+      <p:sp>
+        <p:nvSpPr>
+          <p:cNvPr id="173" name="Stage M label">
+            <a:extLst>
+              <a:ext uri="{FF2B5EF4-FFF2-40B4-BE49-F238E27FC236}">
+                <a16:creationId xmlns:a16="http://schemas.microsoft.com/office/drawing/2014/main" id="{118D78DC-EF8C-45BA-A4F1-648EC0216445}"/>
+              </a:ext>
+            </a:extLst>
+          </p:cNvPr>
+          <p:cNvSpPr>
+            <a:spLocks noGrp="1"/>
+          </p:cNvSpPr>
+          <p:nvPr/>
+        </p:nvSpPr>
+        <p:spPr>
+          <a:xfrm>
+            <a:off x="6506718" y="787241"/>
+            <a:ext cx="228600" cy="127159"/>
+          </a:xfrm>
+          <a:prstGeom prst="rect">
+            <a:avLst/>
+          </a:prstGeom>
+          <a:noFill/>
+          <a:ln w="0">
+            <a:noFill/>
+          </a:ln>
+        </p:spPr>
+        <p:txBody>
+          <a:bodyPr wrap="none" lIns="0" tIns="0" rIns="0" bIns="0" anchor="ctr">
+            <a:noAutofit/>
+          </a:bodyPr>
+          <a:lstStyle/>
+          <a:p>
+            <a:pPr algn="ctr">
+              <a:defRPr sz="975" i="1">
+                <a:solidFill>
+                  <a:srgbClr val="14233E"/>
+                </a:solidFill>
+                <a:latin typeface="Arial"/>
+                <a:ea typeface="Arial"/>
+                <a:cs typeface="Arial"/>
+              </a:defRPr>
+            </a:pPr>
+            <a:r>
+              <a:rPr sz="975" i="1">
+                <a:solidFill>
+                  <a:srgbClr val="14233E"/>
+                </a:solidFill>
+                <a:latin typeface="Arial"/>
+                <a:ea typeface="Arial"/>
+                <a:cs typeface="Arial"/>
+              </a:rPr>
+              <a:t>M</a:t>
+            </a:r>
+          </a:p>
+        </p:txBody>
+      </p:sp>
+      <p:sp>
+        <p:nvSpPr>
+          <p:cNvPr id="174" name="Stage S label">
+            <a:extLst>
+              <a:ext uri="{FF2B5EF4-FFF2-40B4-BE49-F238E27FC236}">
+                <a16:creationId xmlns:a16="http://schemas.microsoft.com/office/drawing/2014/main" id="{F90F3492-7B6E-4FC6-8326-71A392B83F63}"/>
+              </a:ext>
+            </a:extLst>
+          </p:cNvPr>
+          <p:cNvSpPr>
+            <a:spLocks noGrp="1"/>
+          </p:cNvSpPr>
+          <p:nvPr/>
+        </p:nvSpPr>
+        <p:spPr>
+          <a:xfrm>
+            <a:off x="7530084" y="787241"/>
+            <a:ext cx="228600" cy="127159"/>
+          </a:xfrm>
+          <a:prstGeom prst="rect">
+            <a:avLst/>
+          </a:prstGeom>
+          <a:noFill/>
+          <a:ln w="0">
+            <a:noFill/>
+          </a:ln>
+        </p:spPr>
+        <p:txBody>
+          <a:bodyPr wrap="none" lIns="0" tIns="0" rIns="0" bIns="0" anchor="ctr">
+            <a:noAutofit/>
+          </a:bodyPr>
+          <a:lstStyle/>
+          <a:p>
+            <a:pPr algn="ctr">
+              <a:defRPr sz="975" i="1">
+                <a:solidFill>
+                  <a:srgbClr val="14233E"/>
+                </a:solidFill>
+                <a:latin typeface="Arial"/>
+                <a:ea typeface="Arial"/>
+                <a:cs typeface="Arial"/>
+              </a:defRPr>
+            </a:pPr>
+            <a:r>
+              <a:rPr sz="975" i="1">
+                <a:solidFill>
+                  <a:srgbClr val="14233E"/>
+                </a:solidFill>
+                <a:latin typeface="Arial"/>
+                <a:ea typeface="Arial"/>
+                <a:cs typeface="Arial"/>
+              </a:rPr>
+              <a:t>S</a:t>
+            </a:r>
+          </a:p>
+        </p:txBody>
+      </p:sp>
+      <p:sp>
+        <p:nvSpPr>
+          <p:cNvPr id="175" name="Observed durations label">
+            <a:extLst>
+              <a:ext uri="{FF2B5EF4-FFF2-40B4-BE49-F238E27FC236}">
+                <a16:creationId xmlns:a16="http://schemas.microsoft.com/office/drawing/2014/main" id="{B8A8B3B6-FF9A-47C8-BA5B-96F8F42B115B}"/>
+              </a:ext>
+            </a:extLst>
+          </p:cNvPr>
+          <p:cNvSpPr>
+            <a:spLocks noGrp="1"/>
+          </p:cNvSpPr>
+          <p:nvPr/>
+        </p:nvSpPr>
+        <p:spPr>
+          <a:xfrm>
+            <a:off x="8934450" y="2683193"/>
+            <a:ext cx="1619250" cy="182880"/>
+          </a:xfrm>
+          <a:prstGeom prst="rect">
+            <a:avLst/>
+          </a:prstGeom>
+          <a:noFill/>
+          <a:ln w="0">
+            <a:noFill/>
+          </a:ln>
+        </p:spPr>
+        <p:txBody>
+          <a:bodyPr wrap="none" lIns="0" tIns="0" rIns="0" bIns="0" anchor="ctr">
+            <a:noAutofit/>
+          </a:bodyPr>
+          <a:lstStyle/>
+          <a:p>
+            <a:pPr algn="ctr">
+              <a:defRPr sz="1080" i="0">
+                <a:solidFill>
+                  <a:srgbClr val="14233E"/>
+                </a:solidFill>
+                <a:latin typeface="Arial"/>
+                <a:ea typeface="Arial"/>
+                <a:cs typeface="Arial"/>
+              </a:defRPr>
+            </a:pPr>
+            <a:r>
+              <a:rPr sz="1080" i="0">
+                <a:solidFill>
+                  <a:srgbClr val="14233E"/>
+                </a:solidFill>
+                <a:latin typeface="Arial"/>
+                <a:ea typeface="Arial"/>
+                <a:cs typeface="Arial"/>
+              </a:rPr>
+              <a:t>Observed durations</a:t>
+            </a:r>
+          </a:p>
+        </p:txBody>
+      </p:sp>
     </p:spTree>
     <p:extLst>
       <p:ext uri="{BB962C8B-B14F-4D97-AF65-F5344CB8AC3E}">

--- a/figures/fig_controller_interaction.pptx
+++ b/figures/fig_controller_interaction.pptx
@@ -1384,7 +1384,7 @@
               <a:buNone/>
             </a:pPr>
             <a:r>
-              <a:rPr sz="1450" b="1">
+              <a:rPr sz="1450" b="1" dirty="0">
                 <a:solidFill>
                   <a:srgbClr val="14233E"/>
                 </a:solidFill>
@@ -1394,7 +1394,7 @@
               </a:rPr>
               <a:t>One active draft sequence</a:t>
             </a:r>
-            <a:endParaRPr sz="1450"/>
+            <a:endParaRPr sz="1450" dirty="0"/>
           </a:p>
         </p:txBody>
       </p:sp>
@@ -2477,30 +2477,6 @@
           </a:p>
         </p:txBody>
       </p:sp>
-      <p:pic>
-        <p:nvPicPr>
-          <p:cNvPr id="147" name="Image 0"/>
-          <p:cNvPicPr>
-            <a:picLocks noChangeAspect="1"/>
-          </p:cNvPicPr>
-          <p:nvPr/>
-        </p:nvPicPr>
-        <p:blipFill>
-          <a:blip r:embed="rId3"/>
-          <a:stretch>
-            <a:fillRect/>
-          </a:stretch>
-        </p:blipFill>
-        <p:spPr>
-          <a:xfrm>
-            <a:off x="6236208" y="914400"/>
-            <a:ext cx="731520" cy="731520"/>
-          </a:xfrm>
-          <a:prstGeom prst="rect">
-            <a:avLst/>
-          </a:prstGeom>
-        </p:spPr>
-      </p:pic>
       <p:sp>
         <p:nvSpPr>
           <p:cNvPr id="46" name="Shape 43">
@@ -2557,8 +2533,8 @@
         </p:nvSpPr>
         <p:spPr>
           <a:xfrm>
-            <a:off x="7278624" y="914400"/>
-            <a:ext cx="731520" cy="731520"/>
+            <a:off x="7278624" y="941344"/>
+            <a:ext cx="731520" cy="704576"/>
           </a:xfrm>
           <a:prstGeom prst="roundRect">
             <a:avLst>
@@ -3236,7 +3212,7 @@
           <p:nvPr/>
         </p:nvPicPr>
         <p:blipFill>
-          <a:blip r:embed="rId4"/>
+          <a:blip r:embed="rId3"/>
           <a:stretch>
             <a:fillRect/>
           </a:stretch>
@@ -3481,7 +3457,7 @@
           <p:nvPr/>
         </p:nvPicPr>
         <p:blipFill>
-          <a:blip r:embed="rId5"/>
+          <a:blip r:embed="rId4"/>
           <a:stretch>
             <a:fillRect/>
           </a:stretch>
@@ -3609,7 +3585,7 @@
           <p:nvPr/>
         </p:nvPicPr>
         <p:blipFill>
-          <a:blip r:embed="rId6"/>
+          <a:blip r:embed="rId5"/>
           <a:stretch>
             <a:fillRect/>
           </a:stretch>
@@ -4453,78 +4429,6 @@
           </a:p>
         </p:txBody>
       </p:sp>
-      <p:sp>
-        <p:nvSpPr>
-          <p:cNvPr id="17" name="Shape 44">
-            <a:extLst>
-              <a:ext uri="{FF2B5EF4-FFF2-40B4-BE49-F238E27FC236}">
-                <a16:creationId xmlns:a16="http://schemas.microsoft.com/office/drawing/2014/main" id="{28FF3AE0-410E-976A-7F87-F33191C42FAA}"/>
-              </a:ext>
-            </a:extLst>
-          </p:cNvPr>
-          <p:cNvSpPr>
-            <a:spLocks noGrp="1"/>
-          </p:cNvSpPr>
-          <p:nvPr/>
-        </p:nvSpPr>
-        <p:spPr>
-          <a:xfrm>
-            <a:off x="6251956" y="914400"/>
-            <a:ext cx="731520" cy="731520"/>
-          </a:xfrm>
-          <a:prstGeom prst="roundRect">
-            <a:avLst>
-              <a:gd name="adj" fmla="val 6250"/>
-            </a:avLst>
-          </a:prstGeom>
-          <a:solidFill>
-            <a:srgbClr val="FFFFFF"/>
-          </a:solidFill>
-          <a:ln w="13335">
-            <a:solidFill>
-              <a:srgbClr val="14233E"/>
-            </a:solidFill>
-            <a:prstDash val="solid"/>
-          </a:ln>
-        </p:spPr>
-        <p:txBody>
-          <a:bodyPr/>
-          <a:lstStyle/>
-          <a:p>
-            <a:endParaRPr/>
-          </a:p>
-        </p:txBody>
-      </p:sp>
-      <p:pic>
-        <p:nvPicPr>
-          <p:cNvPr id="20" name="그림 19" descr="The image depicts a neatly aligned stack of documents or papers with a star-like pattern on the corner.&#10;&#10;AI 생성 콘텐츠는 정확하지 않을 수 있습니다.">
-            <a:extLst>
-              <a:ext uri="{FF2B5EF4-FFF2-40B4-BE49-F238E27FC236}">
-                <a16:creationId xmlns:a16="http://schemas.microsoft.com/office/drawing/2014/main" id="{33AF534F-7179-3D27-FA33-B9A95E120480}"/>
-              </a:ext>
-            </a:extLst>
-          </p:cNvPr>
-          <p:cNvPicPr>
-            <a:picLocks noChangeAspect="1"/>
-          </p:cNvPicPr>
-          <p:nvPr/>
-        </p:nvPicPr>
-        <p:blipFill>
-          <a:blip r:embed="rId7"/>
-          <a:stretch>
-            <a:fillRect/>
-          </a:stretch>
-        </p:blipFill>
-        <p:spPr>
-          <a:xfrm>
-            <a:off x="6327648" y="964535"/>
-            <a:ext cx="611677" cy="631250"/>
-          </a:xfrm>
-          <a:prstGeom prst="rect">
-            <a:avLst/>
-          </a:prstGeom>
-        </p:spPr>
-      </p:pic>
       <p:cxnSp>
         <p:nvCxnSpPr>
           <p:cNvPr id="45" name="연결선: 꺾임 44">
@@ -4640,7 +4544,7 @@
           <p:nvPr/>
         </p:nvPicPr>
         <p:blipFill>
-          <a:blip r:embed="rId8"/>
+          <a:blip r:embed="rId6"/>
           <a:stretch>
             <a:fillRect/>
           </a:stretch>
@@ -4710,14 +4614,14 @@
           <p:nvPr/>
         </p:nvPicPr>
         <p:blipFill>
-          <a:blip r:embed="rId9"/>
+          <a:blip r:embed="rId7"/>
           <a:stretch>
             <a:fillRect/>
           </a:stretch>
         </p:blipFill>
         <p:spPr>
           <a:xfrm>
-            <a:off x="9790104" y="1958143"/>
+            <a:off x="9727067" y="1909156"/>
             <a:ext cx="1099829" cy="733219"/>
           </a:xfrm>
           <a:prstGeom prst="rect">
@@ -4741,7 +4645,7 @@
         </p:nvSpPr>
         <p:spPr>
           <a:xfrm>
-            <a:off x="6506718" y="787241"/>
+            <a:off x="6506718" y="798127"/>
             <a:ext cx="228600" cy="127159"/>
           </a:xfrm>
           <a:prstGeom prst="rect">
@@ -4769,7 +4673,7 @@
               </a:defRPr>
             </a:pPr>
             <a:r>
-              <a:rPr sz="975" i="1">
+              <a:rPr sz="975" i="1" dirty="0">
                 <a:solidFill>
                   <a:srgbClr val="14233E"/>
                 </a:solidFill>
@@ -4798,7 +4702,7 @@
         </p:nvSpPr>
         <p:spPr>
           <a:xfrm>
-            <a:off x="7530084" y="787241"/>
+            <a:off x="7530084" y="798127"/>
             <a:ext cx="228600" cy="127159"/>
           </a:xfrm>
           <a:prstGeom prst="rect">
@@ -4855,7 +4759,7 @@
         </p:nvSpPr>
         <p:spPr>
           <a:xfrm>
-            <a:off x="8934450" y="2683193"/>
+            <a:off x="9467849" y="2425404"/>
             <a:ext cx="1619250" cy="182880"/>
           </a:xfrm>
           <a:prstGeom prst="rect">
@@ -4883,7 +4787,7 @@
               </a:defRPr>
             </a:pPr>
             <a:r>
-              <a:rPr sz="1080" i="0">
+              <a:rPr sz="900" i="0" dirty="0">
                 <a:solidFill>
                   <a:srgbClr val="14233E"/>
                 </a:solidFill>
@@ -4896,6 +4800,78 @@
           </a:p>
         </p:txBody>
       </p:sp>
+      <p:sp>
+        <p:nvSpPr>
+          <p:cNvPr id="73" name="Shape 44">
+            <a:extLst>
+              <a:ext uri="{FF2B5EF4-FFF2-40B4-BE49-F238E27FC236}">
+                <a16:creationId xmlns:a16="http://schemas.microsoft.com/office/drawing/2014/main" id="{C9343FE8-1582-1EC6-5091-13DD4F1A2332}"/>
+              </a:ext>
+            </a:extLst>
+          </p:cNvPr>
+          <p:cNvSpPr>
+            <a:spLocks noGrp="1"/>
+          </p:cNvSpPr>
+          <p:nvPr/>
+        </p:nvSpPr>
+        <p:spPr>
+          <a:xfrm>
+            <a:off x="6233656" y="941344"/>
+            <a:ext cx="731520" cy="704576"/>
+          </a:xfrm>
+          <a:prstGeom prst="roundRect">
+            <a:avLst>
+              <a:gd name="adj" fmla="val 6250"/>
+            </a:avLst>
+          </a:prstGeom>
+          <a:solidFill>
+            <a:srgbClr val="FFFFFF"/>
+          </a:solidFill>
+          <a:ln w="13335">
+            <a:solidFill>
+              <a:srgbClr val="14233E"/>
+            </a:solidFill>
+            <a:prstDash val="solid"/>
+          </a:ln>
+        </p:spPr>
+        <p:txBody>
+          <a:bodyPr/>
+          <a:lstStyle/>
+          <a:p>
+            <a:endParaRPr/>
+          </a:p>
+        </p:txBody>
+      </p:sp>
+      <p:pic>
+        <p:nvPicPr>
+          <p:cNvPr id="20" name="그림 19" descr="The image depicts a neatly aligned stack of documents or papers with a star-like pattern on the corner.&#10;&#10;AI 생성 콘텐츠는 정확하지 않을 수 있습니다.">
+            <a:extLst>
+              <a:ext uri="{FF2B5EF4-FFF2-40B4-BE49-F238E27FC236}">
+                <a16:creationId xmlns:a16="http://schemas.microsoft.com/office/drawing/2014/main" id="{33AF534F-7179-3D27-FA33-B9A95E120480}"/>
+              </a:ext>
+            </a:extLst>
+          </p:cNvPr>
+          <p:cNvPicPr>
+            <a:picLocks noChangeAspect="1"/>
+          </p:cNvPicPr>
+          <p:nvPr/>
+        </p:nvPicPr>
+        <p:blipFill>
+          <a:blip r:embed="rId8"/>
+          <a:stretch>
+            <a:fillRect/>
+          </a:stretch>
+        </p:blipFill>
+        <p:spPr>
+          <a:xfrm>
+            <a:off x="6301187" y="1032206"/>
+            <a:ext cx="611677" cy="563578"/>
+          </a:xfrm>
+          <a:prstGeom prst="rect">
+            <a:avLst/>
+          </a:prstGeom>
+        </p:spPr>
+      </p:pic>
     </p:spTree>
     <p:extLst>
       <p:ext uri="{BB962C8B-B14F-4D97-AF65-F5344CB8AC3E}">

--- a/figures/fig_controller_interaction.pptx
+++ b/figures/fig_controller_interaction.pptx
@@ -1170,6 +1170,17 @@
               <a:buNone/>
             </a:pPr>
             <a:r>
+              <a:rPr lang="en-US" sz="1450" b="1" dirty="0">
+                <a:solidFill>
+                  <a:srgbClr val="14233E"/>
+                </a:solidFill>
+                <a:latin typeface="Arial"/>
+                <a:ea typeface="Arial"/>
+                <a:cs typeface="Arial"/>
+              </a:rPr>
+              <a:t>D</a:t>
+            </a:r>
+            <a:r>
               <a:rPr sz="1450" b="1" dirty="0">
                 <a:solidFill>
                   <a:srgbClr val="14233E"/>
@@ -1178,7 +1189,18 @@
                 <a:ea typeface="Arial"/>
                 <a:cs typeface="Arial"/>
               </a:rPr>
-              <a:t>Pending draft sequences</a:t>
+              <a:t>raft sequence</a:t>
+            </a:r>
+            <a:r>
+              <a:rPr lang="en-US" sz="1450" b="1" dirty="0">
+                <a:solidFill>
+                  <a:srgbClr val="14233E"/>
+                </a:solidFill>
+                <a:latin typeface="Arial"/>
+                <a:ea typeface="Arial"/>
+                <a:cs typeface="Arial"/>
+              </a:rPr>
+              <a:t> Queue</a:t>
             </a:r>
             <a:endParaRPr sz="1450" dirty="0"/>
           </a:p>
@@ -3313,7 +3335,7 @@
               </a:defRPr>
             </a:pPr>
             <a:r>
-              <a:rPr sz="1200" b="1">
+              <a:rPr lang="en-US" sz="1200" b="1" dirty="0" err="1">
                 <a:solidFill>
                   <a:srgbClr val="2476D2"/>
                 </a:solidFill>
@@ -3321,9 +3343,9 @@
                 <a:ea typeface="Arial"/>
                 <a:cs typeface="Arial"/>
               </a:rPr>
-              <a:t>Admission decision</a:t>
+              <a:t>decideAdmission</a:t>
             </a:r>
-            <a:endParaRPr sz="1200" b="1"/>
+            <a:endParaRPr sz="1200" b="1" dirty="0"/>
           </a:p>
         </p:txBody>
       </p:sp>
@@ -4045,7 +4067,18 @@
                 <a:ea typeface="Arial"/>
                 <a:cs typeface="Arial"/>
               </a:rPr>
-              <a:t>Duration Estimates</a:t>
+              <a:t>Duration </a:t>
+            </a:r>
+            <a:r>
+              <a:rPr lang="en-US" sz="1200" b="1" dirty="0">
+                <a:solidFill>
+                  <a:srgbClr val="14233E"/>
+                </a:solidFill>
+                <a:latin typeface="Arial"/>
+                <a:ea typeface="Arial"/>
+                <a:cs typeface="Arial"/>
+              </a:rPr>
+              <a:t>Predictor</a:t>
             </a:r>
             <a:endParaRPr sz="1200" b="1" dirty="0"/>
           </a:p>
@@ -4281,7 +4314,7 @@
               </a:defRPr>
             </a:pPr>
             <a:r>
-              <a:rPr sz="1200" b="1">
+              <a:rPr lang="en-US" sz="1200" b="1" dirty="0" err="1">
                 <a:solidFill>
                   <a:srgbClr val="E56E2E"/>
                 </a:solidFill>
@@ -4289,9 +4322,9 @@
                 <a:ea typeface="Arial"/>
                 <a:cs typeface="Arial"/>
               </a:rPr>
-              <a:t>Pacing decision</a:t>
+              <a:t>decidePacingDelay</a:t>
             </a:r>
-            <a:endParaRPr sz="1200" b="1"/>
+            <a:endParaRPr sz="1200" b="1" dirty="0"/>
           </a:p>
         </p:txBody>
       </p:sp>
@@ -4574,7 +4607,7 @@
         <p:spPr>
           <a:xfrm>
             <a:off x="3024836" y="679734"/>
-            <a:ext cx="670376" cy="261610"/>
+            <a:ext cx="1210588" cy="261610"/>
           </a:xfrm>
           <a:prstGeom prst="rect">
             <a:avLst/>
@@ -4589,11 +4622,7 @@
           <a:p>
             <a:r>
               <a:rPr lang="en-US" altLang="ko-KR" sz="1100" dirty="0"/>
-              <a:t>i</a:t>
-            </a:r>
-            <a:r>
-              <a:rPr lang="en-US" altLang="ko-KR" sz="1100"/>
-              <a:t>n-order</a:t>
+              <a:t>Capture in-order</a:t>
             </a:r>
             <a:endParaRPr lang="ko-KR" altLang="en-US" sz="1100" dirty="0"/>
           </a:p>
@@ -4787,6 +4816,17 @@
               </a:defRPr>
             </a:pPr>
             <a:r>
+              <a:rPr lang="en-US" sz="900" dirty="0">
+                <a:solidFill>
+                  <a:srgbClr val="14233E"/>
+                </a:solidFill>
+                <a:latin typeface="Arial"/>
+                <a:ea typeface="Arial"/>
+                <a:cs typeface="Arial"/>
+              </a:rPr>
+              <a:t>measured</a:t>
+            </a:r>
+            <a:r>
               <a:rPr sz="900" i="0" dirty="0">
                 <a:solidFill>
                   <a:srgbClr val="14233E"/>
@@ -4795,7 +4835,7 @@
                 <a:ea typeface="Arial"/>
                 <a:cs typeface="Arial"/>
               </a:rPr>
-              <a:t>Observed durations</a:t>
+              <a:t> durations</a:t>
             </a:r>
           </a:p>
         </p:txBody>

--- a/figures/fig_controller_interaction.pptx
+++ b/figures/fig_controller_interaction.pptx
@@ -4037,7 +4037,7 @@
               </a:defRPr>
             </a:pPr>
             <a:r>
-              <a:rPr sz="1200" b="1" dirty="0">
+              <a:rPr lang="en-US" sz="1200" b="1" dirty="0">
                 <a:solidFill>
                   <a:srgbClr val="14233E"/>
                 </a:solidFill>
@@ -4045,18 +4045,7 @@
                 <a:ea typeface="Arial"/>
                 <a:cs typeface="Arial"/>
               </a:rPr>
-              <a:t>Online</a:t>
-            </a:r>
-            <a:r>
-              <a:rPr lang="en-US" sz="1200" b="1" dirty="0">
-                <a:solidFill>
-                  <a:srgbClr val="14233E"/>
-                </a:solidFill>
-                <a:latin typeface="Arial"/>
-                <a:ea typeface="Arial"/>
-                <a:cs typeface="Arial"/>
-              </a:rPr>
-              <a:t> </a:t>
+              <a:t>Online </a:t>
             </a:r>
             <a:r>
               <a:rPr sz="1200" b="1" dirty="0">
@@ -4322,7 +4311,7 @@
                 <a:ea typeface="Arial"/>
                 <a:cs typeface="Arial"/>
               </a:rPr>
-              <a:t>decidePacingDelay</a:t>
+              <a:t>decideDelay</a:t>
             </a:r>
             <a:endParaRPr sz="1200" b="1" dirty="0"/>
           </a:p>

--- a/figures/fig_controller_interaction.pptx
+++ b/figures/fig_controller_interaction.pptx
@@ -3343,7 +3343,7 @@
                 <a:ea typeface="Arial"/>
                 <a:cs typeface="Arial"/>
               </a:rPr>
-              <a:t>decideAdmission</a:t>
+              <a:t>decideExecution</a:t>
             </a:r>
             <a:endParaRPr sz="1200" b="1" dirty="0"/>
           </a:p>

--- a/figures/fig_controller_interaction.pptx
+++ b/figures/fig_controller_interaction.pptx
@@ -1178,10 +1178,10 @@
                 <a:ea typeface="Arial"/>
                 <a:cs typeface="Arial"/>
               </a:rPr>
-              <a:t>D</a:t>
+              <a:t>Pending D</a:t>
             </a:r>
             <a:r>
-              <a:rPr sz="1450" b="1" dirty="0">
+              <a:rPr sz="1450" b="1">
                 <a:solidFill>
                   <a:srgbClr val="14233E"/>
                 </a:solidFill>
@@ -1192,7 +1192,7 @@
               <a:t>raft sequence</a:t>
             </a:r>
             <a:r>
-              <a:rPr lang="en-US" sz="1450" b="1" dirty="0">
+              <a:rPr lang="en-US" sz="1450" b="1">
                 <a:solidFill>
                   <a:srgbClr val="14233E"/>
                 </a:solidFill>
@@ -1200,7 +1200,7 @@
                 <a:ea typeface="Arial"/>
                 <a:cs typeface="Arial"/>
               </a:rPr>
-              <a:t> Queue</a:t>
+              <a:t>s</a:t>
             </a:r>
             <a:endParaRPr sz="1450" dirty="0"/>
           </a:p>

--- a/figures/fig_controller_interaction.pptx
+++ b/figures/fig_controller_interaction.pptx
@@ -1178,10 +1178,10 @@
                 <a:ea typeface="Arial"/>
                 <a:cs typeface="Arial"/>
               </a:rPr>
-              <a:t>Pending D</a:t>
+              <a:t>Pending d</a:t>
             </a:r>
             <a:r>
-              <a:rPr sz="1450" b="1">
+              <a:rPr sz="1450" b="1" dirty="0">
                 <a:solidFill>
                   <a:srgbClr val="14233E"/>
                 </a:solidFill>
@@ -1192,7 +1192,7 @@
               <a:t>raft sequence</a:t>
             </a:r>
             <a:r>
-              <a:rPr lang="en-US" sz="1450" b="1">
+              <a:rPr lang="en-US" sz="1450" b="1" dirty="0">
                 <a:solidFill>
                   <a:srgbClr val="14233E"/>
                 </a:solidFill>
@@ -1390,7 +1390,7 @@
         </p:nvSpPr>
         <p:spPr>
           <a:xfrm>
-            <a:off x="5504688" y="164592"/>
+            <a:off x="5751100" y="164592"/>
             <a:ext cx="4846320" cy="310896"/>
           </a:xfrm>
           <a:prstGeom prst="rect">
@@ -1406,6 +1406,17 @@
               <a:buNone/>
             </a:pPr>
             <a:r>
+              <a:rPr lang="en-US" sz="1450" b="1" dirty="0">
+                <a:solidFill>
+                  <a:srgbClr val="14233E"/>
+                </a:solidFill>
+                <a:latin typeface="Arial"/>
+                <a:ea typeface="Arial"/>
+                <a:cs typeface="Arial"/>
+              </a:rPr>
+              <a:t>Run</a:t>
+            </a:r>
+            <a:r>
               <a:rPr sz="1450" b="1" dirty="0">
                 <a:solidFill>
                   <a:srgbClr val="14233E"/>
@@ -1414,7 +1425,7 @@
                 <a:ea typeface="Arial"/>
                 <a:cs typeface="Arial"/>
               </a:rPr>
-              <a:t>One active draft sequence</a:t>
+              <a:t> draft sequence</a:t>
             </a:r>
             <a:endParaRPr sz="1450" dirty="0"/>
           </a:p>
@@ -4691,7 +4702,7 @@
               </a:defRPr>
             </a:pPr>
             <a:r>
-              <a:rPr sz="975" i="1" dirty="0">
+              <a:rPr lang="en-US" altLang="ko-KR" sz="975" i="1" dirty="0">
                 <a:solidFill>
                   <a:srgbClr val="14233E"/>
                 </a:solidFill>
@@ -4901,6 +4912,63 @@
           </a:prstGeom>
         </p:spPr>
       </p:pic>
+      <p:sp>
+        <p:nvSpPr>
+          <p:cNvPr id="85" name="Stage M label">
+            <a:extLst>
+              <a:ext uri="{FF2B5EF4-FFF2-40B4-BE49-F238E27FC236}">
+                <a16:creationId xmlns:a16="http://schemas.microsoft.com/office/drawing/2014/main" id="{33C14D2F-BEBA-5EEA-8875-F37AAB6BF62C}"/>
+              </a:ext>
+            </a:extLst>
+          </p:cNvPr>
+          <p:cNvSpPr>
+            <a:spLocks noGrp="1"/>
+          </p:cNvSpPr>
+          <p:nvPr/>
+        </p:nvSpPr>
+        <p:spPr>
+          <a:xfrm>
+            <a:off x="2699118" y="1097187"/>
+            <a:ext cx="228600" cy="127159"/>
+          </a:xfrm>
+          <a:prstGeom prst="rect">
+            <a:avLst/>
+          </a:prstGeom>
+          <a:noFill/>
+          <a:ln w="0">
+            <a:noFill/>
+          </a:ln>
+        </p:spPr>
+        <p:txBody>
+          <a:bodyPr wrap="none" lIns="0" tIns="0" rIns="0" bIns="0" anchor="ctr">
+            <a:noAutofit/>
+          </a:bodyPr>
+          <a:lstStyle/>
+          <a:p>
+            <a:pPr algn="ctr">
+              <a:defRPr sz="975" i="1">
+                <a:solidFill>
+                  <a:srgbClr val="14233E"/>
+                </a:solidFill>
+                <a:latin typeface="Arial"/>
+                <a:ea typeface="Arial"/>
+                <a:cs typeface="Arial"/>
+              </a:defRPr>
+            </a:pPr>
+            <a:r>
+              <a:rPr lang="en-US" altLang="ko-KR" sz="800" i="1" dirty="0">
+                <a:solidFill>
+                  <a:srgbClr val="14233E"/>
+                </a:solidFill>
+                <a:latin typeface="Arial"/>
+                <a:ea typeface="Arial"/>
+                <a:cs typeface="Arial"/>
+              </a:rPr>
+              <a:t>Enqueue</a:t>
+            </a:r>
+          </a:p>
+        </p:txBody>
+      </p:sp>
     </p:spTree>
     <p:extLst>
       <p:ext uri="{BB962C8B-B14F-4D97-AF65-F5344CB8AC3E}">

--- a/figures/fig_controller_interaction.pptx
+++ b/figures/fig_controller_interaction.pptx
@@ -4016,7 +4016,7 @@
               </a:defRPr>
             </a:pPr>
             <a:r>
-              <a:rPr sz="1200" b="1" dirty="0">
+              <a:rPr lang="en-US" sz="1200" b="1" dirty="0">
                 <a:solidFill>
                   <a:srgbClr val="14233E"/>
                 </a:solidFill>
@@ -4026,14 +4026,6 @@
               </a:rPr>
               <a:t>Workload Model &amp; </a:t>
             </a:r>
-            <a:endParaRPr lang="en-US" sz="1200" b="1" dirty="0">
-              <a:solidFill>
-                <a:srgbClr val="14233E"/>
-              </a:solidFill>
-              <a:latin typeface="Arial"/>
-              <a:ea typeface="Arial"/>
-              <a:cs typeface="Arial"/>
-            </a:endParaRPr>
           </a:p>
           <a:p>
             <a:pPr marL="0" indent="0" algn="l">
@@ -4056,10 +4048,10 @@
                 <a:ea typeface="Arial"/>
                 <a:cs typeface="Arial"/>
               </a:rPr>
-              <a:t>Online </a:t>
+              <a:t>Shared </a:t>
             </a:r>
             <a:r>
-              <a:rPr sz="1200" b="1" dirty="0">
+              <a:rPr lang="en-US" sz="1200" b="1">
                 <a:solidFill>
                   <a:srgbClr val="14233E"/>
                 </a:solidFill>
@@ -4067,10 +4059,21 @@
                 <a:ea typeface="Arial"/>
                 <a:cs typeface="Arial"/>
               </a:rPr>
-              <a:t>Duration </a:t>
+              <a:t>Duration</a:t>
             </a:r>
             <a:r>
-              <a:rPr lang="en-US" sz="1200" b="1" dirty="0">
+              <a:rPr sz="1200" b="1">
+                <a:solidFill>
+                  <a:srgbClr val="14233E"/>
+                </a:solidFill>
+                <a:latin typeface="Arial"/>
+                <a:ea typeface="Arial"/>
+                <a:cs typeface="Arial"/>
+              </a:rPr>
+              <a:t> </a:t>
+            </a:r>
+            <a:r>
+              <a:rPr lang="en-US" sz="1200" b="1">
                 <a:solidFill>
                   <a:srgbClr val="14233E"/>
                 </a:solidFill>

--- a/figures/fig_controller_interaction.pptx
+++ b/figures/fig_controller_interaction.pptx
@@ -3354,7 +3354,7 @@
                 <a:ea typeface="Arial"/>
                 <a:cs typeface="Arial"/>
               </a:rPr>
-              <a:t>decideExecution</a:t>
+              <a:t>decideAdmission</a:t>
             </a:r>
             <a:endParaRPr sz="1200" b="1" dirty="0"/>
           </a:p>
@@ -4048,21 +4048,10 @@
                 <a:ea typeface="Arial"/>
                 <a:cs typeface="Arial"/>
               </a:rPr>
-              <a:t>Shared </a:t>
+              <a:t>Shared Duration</a:t>
             </a:r>
             <a:r>
-              <a:rPr lang="en-US" sz="1200" b="1">
-                <a:solidFill>
-                  <a:srgbClr val="14233E"/>
-                </a:solidFill>
-                <a:latin typeface="Arial"/>
-                <a:ea typeface="Arial"/>
-                <a:cs typeface="Arial"/>
-              </a:rPr>
-              <a:t>Duration</a:t>
-            </a:r>
-            <a:r>
-              <a:rPr sz="1200" b="1">
+              <a:rPr sz="1200" b="1" dirty="0">
                 <a:solidFill>
                   <a:srgbClr val="14233E"/>
                 </a:solidFill>
@@ -4073,7 +4062,7 @@
               <a:t> </a:t>
             </a:r>
             <a:r>
-              <a:rPr lang="en-US" sz="1200" b="1">
+              <a:rPr lang="en-US" sz="1200" b="1" dirty="0">
                 <a:solidFill>
                   <a:srgbClr val="14233E"/>
                 </a:solidFill>
@@ -4293,7 +4282,7 @@
         </p:nvSpPr>
         <p:spPr>
           <a:xfrm>
-            <a:off x="802958" y="2282285"/>
+            <a:off x="988694" y="2282285"/>
             <a:ext cx="1219200" cy="228219"/>
           </a:xfrm>
           <a:prstGeom prst="rect">
@@ -4325,7 +4314,7 @@
                 <a:ea typeface="Arial"/>
                 <a:cs typeface="Arial"/>
               </a:rPr>
-              <a:t>decideDelay</a:t>
+              <a:t>decidePacingDelay</a:t>
             </a:r>
             <a:endParaRPr sz="1200" b="1" dirty="0"/>
           </a:p>
@@ -4481,8 +4470,8 @@
         </p:nvCxnSpPr>
         <p:spPr>
           <a:xfrm rot="16200000" flipH="1">
-            <a:off x="882830" y="1382384"/>
-            <a:ext cx="1141200" cy="1299380"/>
+            <a:off x="971140" y="1294074"/>
+            <a:ext cx="1141200" cy="1476000"/>
           </a:xfrm>
           <a:prstGeom prst="bentConnector3">
             <a:avLst>

--- a/figures/fig_controller_interaction.pptx
+++ b/figures/fig_controller_interaction.pptx
@@ -4003,30 +4003,6 @@
         <p:txBody>
           <a:bodyPr wrap="none" lIns="0" tIns="0" rIns="0" bIns="0" anchor="ctr"/>
           <a:lstStyle/>
-          <a:p>
-            <a:pPr marL="0" indent="0" algn="l">
-              <a:buNone/>
-              <a:defRPr sz="1200" b="1">
-                <a:solidFill>
-                  <a:srgbClr val="14233E"/>
-                </a:solidFill>
-                <a:latin typeface="Arial"/>
-                <a:ea typeface="Arial"/>
-                <a:cs typeface="Arial"/>
-              </a:defRPr>
-            </a:pPr>
-            <a:r>
-              <a:rPr lang="en-US" sz="1200" b="1" dirty="0">
-                <a:solidFill>
-                  <a:srgbClr val="14233E"/>
-                </a:solidFill>
-                <a:latin typeface="Arial"/>
-                <a:ea typeface="Arial"/>
-                <a:cs typeface="Arial"/>
-              </a:rPr>
-              <a:t>Workload Model &amp; </a:t>
-            </a:r>
-          </a:p>
           <a:p>
             <a:pPr marL="0" indent="0" algn="l">
               <a:buNone/>
